--- a/docs/Messanger.pptx
+++ b/docs/Messanger.pptx
@@ -243,7 +243,7 @@
           <a:p>
             <a:fld id="{652A32E5-6120-4B4C-8BD1-03EFF52E8ACB}" type="datetimeFigureOut">
               <a:rPr lang="ru-RU" smtClean="0"/>
-              <a:t>16.03.2026</a:t>
+              <a:t>19.03.2026</a:t>
             </a:fld>
             <a:endParaRPr lang="ru-RU"/>
           </a:p>
@@ -413,7 +413,7 @@
           <a:p>
             <a:fld id="{652A32E5-6120-4B4C-8BD1-03EFF52E8ACB}" type="datetimeFigureOut">
               <a:rPr lang="ru-RU" smtClean="0"/>
-              <a:t>16.03.2026</a:t>
+              <a:t>19.03.2026</a:t>
             </a:fld>
             <a:endParaRPr lang="ru-RU"/>
           </a:p>
@@ -593,7 +593,7 @@
           <a:p>
             <a:fld id="{652A32E5-6120-4B4C-8BD1-03EFF52E8ACB}" type="datetimeFigureOut">
               <a:rPr lang="ru-RU" smtClean="0"/>
-              <a:t>16.03.2026</a:t>
+              <a:t>19.03.2026</a:t>
             </a:fld>
             <a:endParaRPr lang="ru-RU"/>
           </a:p>
@@ -763,7 +763,7 @@
           <a:p>
             <a:fld id="{652A32E5-6120-4B4C-8BD1-03EFF52E8ACB}" type="datetimeFigureOut">
               <a:rPr lang="ru-RU" smtClean="0"/>
-              <a:t>16.03.2026</a:t>
+              <a:t>19.03.2026</a:t>
             </a:fld>
             <a:endParaRPr lang="ru-RU"/>
           </a:p>
@@ -1007,7 +1007,7 @@
           <a:p>
             <a:fld id="{652A32E5-6120-4B4C-8BD1-03EFF52E8ACB}" type="datetimeFigureOut">
               <a:rPr lang="ru-RU" smtClean="0"/>
-              <a:t>16.03.2026</a:t>
+              <a:t>19.03.2026</a:t>
             </a:fld>
             <a:endParaRPr lang="ru-RU"/>
           </a:p>
@@ -1239,7 +1239,7 @@
           <a:p>
             <a:fld id="{652A32E5-6120-4B4C-8BD1-03EFF52E8ACB}" type="datetimeFigureOut">
               <a:rPr lang="ru-RU" smtClean="0"/>
-              <a:t>16.03.2026</a:t>
+              <a:t>19.03.2026</a:t>
             </a:fld>
             <a:endParaRPr lang="ru-RU"/>
           </a:p>
@@ -1606,7 +1606,7 @@
           <a:p>
             <a:fld id="{652A32E5-6120-4B4C-8BD1-03EFF52E8ACB}" type="datetimeFigureOut">
               <a:rPr lang="ru-RU" smtClean="0"/>
-              <a:t>16.03.2026</a:t>
+              <a:t>19.03.2026</a:t>
             </a:fld>
             <a:endParaRPr lang="ru-RU"/>
           </a:p>
@@ -1724,7 +1724,7 @@
           <a:p>
             <a:fld id="{652A32E5-6120-4B4C-8BD1-03EFF52E8ACB}" type="datetimeFigureOut">
               <a:rPr lang="ru-RU" smtClean="0"/>
-              <a:t>16.03.2026</a:t>
+              <a:t>19.03.2026</a:t>
             </a:fld>
             <a:endParaRPr lang="ru-RU"/>
           </a:p>
@@ -1819,7 +1819,7 @@
           <a:p>
             <a:fld id="{652A32E5-6120-4B4C-8BD1-03EFF52E8ACB}" type="datetimeFigureOut">
               <a:rPr lang="ru-RU" smtClean="0"/>
-              <a:t>16.03.2026</a:t>
+              <a:t>19.03.2026</a:t>
             </a:fld>
             <a:endParaRPr lang="ru-RU"/>
           </a:p>
@@ -2096,7 +2096,7 @@
           <a:p>
             <a:fld id="{652A32E5-6120-4B4C-8BD1-03EFF52E8ACB}" type="datetimeFigureOut">
               <a:rPr lang="ru-RU" smtClean="0"/>
-              <a:t>16.03.2026</a:t>
+              <a:t>19.03.2026</a:t>
             </a:fld>
             <a:endParaRPr lang="ru-RU"/>
           </a:p>
@@ -2353,7 +2353,7 @@
           <a:p>
             <a:fld id="{652A32E5-6120-4B4C-8BD1-03EFF52E8ACB}" type="datetimeFigureOut">
               <a:rPr lang="ru-RU" smtClean="0"/>
-              <a:t>16.03.2026</a:t>
+              <a:t>19.03.2026</a:t>
             </a:fld>
             <a:endParaRPr lang="ru-RU"/>
           </a:p>
@@ -2566,7 +2566,7 @@
           <a:p>
             <a:fld id="{652A32E5-6120-4B4C-8BD1-03EFF52E8ACB}" type="datetimeFigureOut">
               <a:rPr lang="ru-RU" smtClean="0"/>
-              <a:t>16.03.2026</a:t>
+              <a:t>19.03.2026</a:t>
             </a:fld>
             <a:endParaRPr lang="ru-RU"/>
           </a:p>
@@ -3196,6 +3196,7 @@
             </a:extLst>
           </p:cNvPr>
           <p:cNvCxnSpPr>
+            <a:cxnSpLocks/>
             <a:stCxn id="42" idx="2"/>
             <a:endCxn id="5" idx="0"/>
           </p:cNvCxnSpPr>

--- a/docs/Messanger.pptx
+++ b/docs/Messanger.pptx
@@ -243,7 +243,7 @@
           <a:p>
             <a:fld id="{652A32E5-6120-4B4C-8BD1-03EFF52E8ACB}" type="datetimeFigureOut">
               <a:rPr lang="ru-RU" smtClean="0"/>
-              <a:t>19.03.2026</a:t>
+              <a:t>15.04.2026</a:t>
             </a:fld>
             <a:endParaRPr lang="ru-RU"/>
           </a:p>
@@ -413,7 +413,7 @@
           <a:p>
             <a:fld id="{652A32E5-6120-4B4C-8BD1-03EFF52E8ACB}" type="datetimeFigureOut">
               <a:rPr lang="ru-RU" smtClean="0"/>
-              <a:t>19.03.2026</a:t>
+              <a:t>15.04.2026</a:t>
             </a:fld>
             <a:endParaRPr lang="ru-RU"/>
           </a:p>
@@ -593,7 +593,7 @@
           <a:p>
             <a:fld id="{652A32E5-6120-4B4C-8BD1-03EFF52E8ACB}" type="datetimeFigureOut">
               <a:rPr lang="ru-RU" smtClean="0"/>
-              <a:t>19.03.2026</a:t>
+              <a:t>15.04.2026</a:t>
             </a:fld>
             <a:endParaRPr lang="ru-RU"/>
           </a:p>
@@ -763,7 +763,7 @@
           <a:p>
             <a:fld id="{652A32E5-6120-4B4C-8BD1-03EFF52E8ACB}" type="datetimeFigureOut">
               <a:rPr lang="ru-RU" smtClean="0"/>
-              <a:t>19.03.2026</a:t>
+              <a:t>15.04.2026</a:t>
             </a:fld>
             <a:endParaRPr lang="ru-RU"/>
           </a:p>
@@ -1007,7 +1007,7 @@
           <a:p>
             <a:fld id="{652A32E5-6120-4B4C-8BD1-03EFF52E8ACB}" type="datetimeFigureOut">
               <a:rPr lang="ru-RU" smtClean="0"/>
-              <a:t>19.03.2026</a:t>
+              <a:t>15.04.2026</a:t>
             </a:fld>
             <a:endParaRPr lang="ru-RU"/>
           </a:p>
@@ -1239,7 +1239,7 @@
           <a:p>
             <a:fld id="{652A32E5-6120-4B4C-8BD1-03EFF52E8ACB}" type="datetimeFigureOut">
               <a:rPr lang="ru-RU" smtClean="0"/>
-              <a:t>19.03.2026</a:t>
+              <a:t>15.04.2026</a:t>
             </a:fld>
             <a:endParaRPr lang="ru-RU"/>
           </a:p>
@@ -1606,7 +1606,7 @@
           <a:p>
             <a:fld id="{652A32E5-6120-4B4C-8BD1-03EFF52E8ACB}" type="datetimeFigureOut">
               <a:rPr lang="ru-RU" smtClean="0"/>
-              <a:t>19.03.2026</a:t>
+              <a:t>15.04.2026</a:t>
             </a:fld>
             <a:endParaRPr lang="ru-RU"/>
           </a:p>
@@ -1724,7 +1724,7 @@
           <a:p>
             <a:fld id="{652A32E5-6120-4B4C-8BD1-03EFF52E8ACB}" type="datetimeFigureOut">
               <a:rPr lang="ru-RU" smtClean="0"/>
-              <a:t>19.03.2026</a:t>
+              <a:t>15.04.2026</a:t>
             </a:fld>
             <a:endParaRPr lang="ru-RU"/>
           </a:p>
@@ -1819,7 +1819,7 @@
           <a:p>
             <a:fld id="{652A32E5-6120-4B4C-8BD1-03EFF52E8ACB}" type="datetimeFigureOut">
               <a:rPr lang="ru-RU" smtClean="0"/>
-              <a:t>19.03.2026</a:t>
+              <a:t>15.04.2026</a:t>
             </a:fld>
             <a:endParaRPr lang="ru-RU"/>
           </a:p>
@@ -2096,7 +2096,7 @@
           <a:p>
             <a:fld id="{652A32E5-6120-4B4C-8BD1-03EFF52E8ACB}" type="datetimeFigureOut">
               <a:rPr lang="ru-RU" smtClean="0"/>
-              <a:t>19.03.2026</a:t>
+              <a:t>15.04.2026</a:t>
             </a:fld>
             <a:endParaRPr lang="ru-RU"/>
           </a:p>
@@ -2353,7 +2353,7 @@
           <a:p>
             <a:fld id="{652A32E5-6120-4B4C-8BD1-03EFF52E8ACB}" type="datetimeFigureOut">
               <a:rPr lang="ru-RU" smtClean="0"/>
-              <a:t>19.03.2026</a:t>
+              <a:t>15.04.2026</a:t>
             </a:fld>
             <a:endParaRPr lang="ru-RU"/>
           </a:p>
@@ -2566,7 +2566,7 @@
           <a:p>
             <a:fld id="{652A32E5-6120-4B4C-8BD1-03EFF52E8ACB}" type="datetimeFigureOut">
               <a:rPr lang="ru-RU" smtClean="0"/>
-              <a:t>19.03.2026</a:t>
+              <a:t>15.04.2026</a:t>
             </a:fld>
             <a:endParaRPr lang="ru-RU"/>
           </a:p>
@@ -2973,6 +2973,54 @@
       </p:grpSpPr>
       <p:cxnSp>
         <p:nvCxnSpPr>
+          <p:cNvPr id="46" name="Прямая со стрелкой 45">
+            <a:extLst>
+              <a:ext uri="{FF2B5EF4-FFF2-40B4-BE49-F238E27FC236}">
+                <a16:creationId xmlns:a16="http://schemas.microsoft.com/office/drawing/2014/main" id="{805EF5D9-FE30-4B3C-918F-1ECE2087D929}"/>
+              </a:ext>
+            </a:extLst>
+          </p:cNvPr>
+          <p:cNvCxnSpPr>
+            <a:cxnSpLocks/>
+            <a:stCxn id="5" idx="0"/>
+            <a:endCxn id="44" idx="2"/>
+          </p:cNvCxnSpPr>
+          <p:nvPr/>
+        </p:nvCxnSpPr>
+        <p:spPr>
+          <a:xfrm flipH="1" flipV="1">
+            <a:off x="10797273" y="10457439"/>
+            <a:ext cx="5909424" cy="6232131"/>
+          </a:xfrm>
+          <a:prstGeom prst="straightConnector1">
+            <a:avLst/>
+          </a:prstGeom>
+          <a:ln>
+            <a:solidFill>
+              <a:schemeClr val="accent6">
+                <a:lumMod val="50000"/>
+              </a:schemeClr>
+            </a:solidFill>
+            <a:tailEnd type="triangle"/>
+          </a:ln>
+        </p:spPr>
+        <p:style>
+          <a:lnRef idx="1">
+            <a:schemeClr val="accent1"/>
+          </a:lnRef>
+          <a:fillRef idx="0">
+            <a:schemeClr val="accent1"/>
+          </a:fillRef>
+          <a:effectRef idx="0">
+            <a:schemeClr val="accent1"/>
+          </a:effectRef>
+          <a:fontRef idx="minor">
+            <a:schemeClr val="tx1"/>
+          </a:fontRef>
+        </p:style>
+      </p:cxnSp>
+      <p:cxnSp>
+        <p:nvCxnSpPr>
           <p:cNvPr id="817" name="Прямая со стрелкой 816">
             <a:extLst>
               <a:ext uri="{FF2B5EF4-FFF2-40B4-BE49-F238E27FC236}">
@@ -3109,8 +3157,8 @@
         </p:nvCxnSpPr>
         <p:spPr>
           <a:xfrm flipV="1">
-            <a:off x="5020551" y="10989875"/>
-            <a:ext cx="0" cy="3006659"/>
+            <a:off x="5020551" y="12080119"/>
+            <a:ext cx="0" cy="1916415"/>
           </a:xfrm>
           <a:prstGeom prst="straightConnector1">
             <a:avLst/>
@@ -3155,9 +3203,9 @@
           <p:nvPr/>
         </p:nvCxnSpPr>
         <p:spPr>
-          <a:xfrm flipH="1" flipV="1">
-            <a:off x="16231259" y="10611652"/>
-            <a:ext cx="475438" cy="6077918"/>
+          <a:xfrm flipV="1">
+            <a:off x="16706697" y="10470976"/>
+            <a:ext cx="720314" cy="6218594"/>
           </a:xfrm>
           <a:prstGeom prst="straightConnector1">
             <a:avLst/>
@@ -3251,8 +3299,8 @@
         </p:nvCxnSpPr>
         <p:spPr>
           <a:xfrm flipH="1" flipV="1">
-            <a:off x="5020551" y="10989875"/>
-            <a:ext cx="11686146" cy="5699695"/>
+            <a:off x="5020551" y="12080119"/>
+            <a:ext cx="11686146" cy="4609451"/>
           </a:xfrm>
           <a:prstGeom prst="straightConnector1">
             <a:avLst/>
@@ -3390,7 +3438,7 @@
         </p:nvSpPr>
         <p:spPr>
           <a:xfrm>
-            <a:off x="13576745" y="9400228"/>
+            <a:off x="14772497" y="9259552"/>
             <a:ext cx="5309028" cy="1211424"/>
           </a:xfrm>
           <a:prstGeom prst="roundRect">
@@ -4085,7 +4133,7 @@
         </p:nvSpPr>
         <p:spPr>
           <a:xfrm>
-            <a:off x="2366037" y="9778451"/>
+            <a:off x="2366037" y="10868695"/>
             <a:ext cx="5309028" cy="1211424"/>
           </a:xfrm>
           <a:prstGeom prst="roundRect">
@@ -4219,7 +4267,7 @@
         </p:nvSpPr>
         <p:spPr>
           <a:xfrm>
-            <a:off x="19857626" y="7539279"/>
+            <a:off x="19927965" y="7539279"/>
             <a:ext cx="5309028" cy="1211424"/>
           </a:xfrm>
           <a:prstGeom prst="roundRect">
@@ -4735,7 +4783,7 @@
         </p:nvSpPr>
         <p:spPr>
           <a:xfrm>
-            <a:off x="9592634" y="11395273"/>
+            <a:off x="9592634" y="12309672"/>
             <a:ext cx="5309028" cy="1211424"/>
           </a:xfrm>
           <a:prstGeom prst="roundRect">
@@ -4920,7 +4968,7 @@
         <p:spPr>
           <a:xfrm flipV="1">
             <a:off x="16706697" y="8750703"/>
-            <a:ext cx="5805443" cy="7938867"/>
+            <a:ext cx="5875782" cy="7938867"/>
           </a:xfrm>
           <a:prstGeom prst="straightConnector1">
             <a:avLst/>
@@ -5013,8 +5061,8 @@
         </p:nvCxnSpPr>
         <p:spPr>
           <a:xfrm flipV="1">
-            <a:off x="25166654" y="8142795"/>
-            <a:ext cx="3722603" cy="2196"/>
+            <a:off x="25236993" y="8142795"/>
+            <a:ext cx="3652264" cy="2196"/>
           </a:xfrm>
           <a:prstGeom prst="straightConnector1">
             <a:avLst/>
@@ -5060,8 +5108,8 @@
         </p:nvCxnSpPr>
         <p:spPr>
           <a:xfrm>
-            <a:off x="25166654" y="8144991"/>
-            <a:ext cx="3722603" cy="2239172"/>
+            <a:off x="25236993" y="8144991"/>
+            <a:ext cx="3652264" cy="2239172"/>
           </a:xfrm>
           <a:prstGeom prst="straightConnector1">
             <a:avLst/>
@@ -5108,8 +5156,8 @@
         </p:nvCxnSpPr>
         <p:spPr>
           <a:xfrm flipH="1">
-            <a:off x="18885773" y="8750703"/>
-            <a:ext cx="3626367" cy="1255237"/>
+            <a:off x="20081525" y="8750703"/>
+            <a:ext cx="2500954" cy="1114561"/>
           </a:xfrm>
           <a:prstGeom prst="straightConnector1">
             <a:avLst/>
@@ -5157,7 +5205,7 @@
         <p:spPr>
           <a:xfrm flipH="1" flipV="1">
             <a:off x="15553877" y="4013652"/>
-            <a:ext cx="6958263" cy="3525627"/>
+            <a:ext cx="7028602" cy="3525627"/>
           </a:xfrm>
           <a:prstGeom prst="straightConnector1">
             <a:avLst/>
@@ -5205,7 +5253,7 @@
         <p:spPr>
           <a:xfrm flipH="1" flipV="1">
             <a:off x="15553877" y="5922375"/>
-            <a:ext cx="6958263" cy="1616904"/>
+            <a:ext cx="7028602" cy="1616904"/>
           </a:xfrm>
           <a:prstGeom prst="straightConnector1">
             <a:avLst/>
@@ -5253,7 +5301,7 @@
         <p:spPr>
           <a:xfrm flipH="1" flipV="1">
             <a:off x="7675065" y="8142795"/>
-            <a:ext cx="12182561" cy="2196"/>
+            <a:ext cx="12252900" cy="2196"/>
           </a:xfrm>
           <a:prstGeom prst="straightConnector1">
             <a:avLst/>
@@ -5300,8 +5348,8 @@
         </p:nvCxnSpPr>
         <p:spPr>
           <a:xfrm flipH="1" flipV="1">
-            <a:off x="12247148" y="12606697"/>
-            <a:ext cx="4459549" cy="4082873"/>
+            <a:off x="12247148" y="13521096"/>
+            <a:ext cx="4459549" cy="3168474"/>
           </a:xfrm>
           <a:prstGeom prst="straightConnector1">
             <a:avLst/>
@@ -5349,8 +5397,8 @@
         </p:nvCxnSpPr>
         <p:spPr>
           <a:xfrm>
-            <a:off x="5020551" y="10989875"/>
-            <a:ext cx="4572083" cy="1011110"/>
+            <a:off x="5020551" y="12080119"/>
+            <a:ext cx="4572083" cy="835265"/>
           </a:xfrm>
           <a:prstGeom prst="straightConnector1">
             <a:avLst/>
@@ -5445,7 +5493,371 @@
         <p:spPr>
           <a:xfrm flipV="1">
             <a:off x="5020551" y="8748507"/>
-            <a:ext cx="0" cy="1029944"/>
+            <a:ext cx="0" cy="2120188"/>
+          </a:xfrm>
+          <a:prstGeom prst="straightConnector1">
+            <a:avLst/>
+          </a:prstGeom>
+          <a:ln>
+            <a:solidFill>
+              <a:schemeClr val="accent6">
+                <a:lumMod val="50000"/>
+              </a:schemeClr>
+            </a:solidFill>
+            <a:tailEnd type="triangle"/>
+          </a:ln>
+        </p:spPr>
+        <p:style>
+          <a:lnRef idx="1">
+            <a:schemeClr val="accent1"/>
+          </a:lnRef>
+          <a:fillRef idx="0">
+            <a:schemeClr val="accent1"/>
+          </a:fillRef>
+          <a:effectRef idx="0">
+            <a:schemeClr val="accent1"/>
+          </a:effectRef>
+          <a:fontRef idx="minor">
+            <a:schemeClr val="tx1"/>
+          </a:fontRef>
+        </p:style>
+      </p:cxnSp>
+      <p:sp>
+        <p:nvSpPr>
+          <p:cNvPr id="44" name="Прямоугольник: скругленные углы 43">
+            <a:extLst>
+              <a:ext uri="{FF2B5EF4-FFF2-40B4-BE49-F238E27FC236}">
+                <a16:creationId xmlns:a16="http://schemas.microsoft.com/office/drawing/2014/main" id="{A3019CC4-1B4C-48CD-B3B8-9869081D66D1}"/>
+              </a:ext>
+            </a:extLst>
+          </p:cNvPr>
+          <p:cNvSpPr/>
+          <p:nvPr/>
+        </p:nvSpPr>
+        <p:spPr>
+          <a:xfrm>
+            <a:off x="8142759" y="9246015"/>
+            <a:ext cx="5309028" cy="1211424"/>
+          </a:xfrm>
+          <a:prstGeom prst="roundRect">
+            <a:avLst/>
+          </a:prstGeom>
+          <a:gradFill flip="none" rotWithShape="1">
+            <a:gsLst>
+              <a:gs pos="0">
+                <a:schemeClr val="bg1"/>
+              </a:gs>
+              <a:gs pos="100000">
+                <a:schemeClr val="accent6">
+                  <a:lumMod val="20000"/>
+                  <a:lumOff val="80000"/>
+                </a:schemeClr>
+              </a:gs>
+            </a:gsLst>
+            <a:path path="circle">
+              <a:fillToRect l="50000" t="50000" r="50000" b="50000"/>
+            </a:path>
+            <a:tileRect/>
+          </a:gradFill>
+          <a:ln w="12700">
+            <a:solidFill>
+              <a:schemeClr val="accent6">
+                <a:lumMod val="50000"/>
+              </a:schemeClr>
+            </a:solidFill>
+          </a:ln>
+          <a:effectLst>
+            <a:outerShdw blurRad="304800" dist="152400" dir="3360000" sx="95000" sy="95000" algn="ctr" rotWithShape="0">
+              <a:schemeClr val="tx1">
+                <a:alpha val="33000"/>
+              </a:schemeClr>
+            </a:outerShdw>
+          </a:effectLst>
+        </p:spPr>
+        <p:style>
+          <a:lnRef idx="2">
+            <a:schemeClr val="accent1">
+              <a:shade val="50000"/>
+            </a:schemeClr>
+          </a:lnRef>
+          <a:fillRef idx="1">
+            <a:schemeClr val="accent1"/>
+          </a:fillRef>
+          <a:effectRef idx="0">
+            <a:schemeClr val="accent1"/>
+          </a:effectRef>
+          <a:fontRef idx="minor">
+            <a:schemeClr val="lt1"/>
+          </a:fontRef>
+        </p:style>
+        <p:txBody>
+          <a:bodyPr rtlCol="0" anchor="ctr"/>
+          <a:lstStyle/>
+          <a:p>
+            <a:pPr algn="ctr"/>
+            <a:r>
+              <a:rPr lang="ru-RU" sz="3200" dirty="0">
+                <a:solidFill>
+                  <a:schemeClr val="accent6">
+                    <a:lumMod val="50000"/>
+                  </a:schemeClr>
+                </a:solidFill>
+              </a:rPr>
+              <a:t>Метка просмотренных групповых сообщений</a:t>
+            </a:r>
+          </a:p>
+        </p:txBody>
+      </p:sp>
+      <p:sp>
+        <p:nvSpPr>
+          <p:cNvPr id="45" name="Прямоугольник: скругленные углы 44">
+            <a:extLst>
+              <a:ext uri="{FF2B5EF4-FFF2-40B4-BE49-F238E27FC236}">
+                <a16:creationId xmlns:a16="http://schemas.microsoft.com/office/drawing/2014/main" id="{5A3D3671-4086-4DE8-B67E-104251C3EA7D}"/>
+              </a:ext>
+            </a:extLst>
+          </p:cNvPr>
+          <p:cNvSpPr/>
+          <p:nvPr/>
+        </p:nvSpPr>
+        <p:spPr>
+          <a:xfrm>
+            <a:off x="27658335" y="3407940"/>
+            <a:ext cx="5309028" cy="1211424"/>
+          </a:xfrm>
+          <a:prstGeom prst="roundRect">
+            <a:avLst/>
+          </a:prstGeom>
+          <a:gradFill flip="none" rotWithShape="1">
+            <a:gsLst>
+              <a:gs pos="0">
+                <a:schemeClr val="bg1"/>
+              </a:gs>
+              <a:gs pos="100000">
+                <a:schemeClr val="accent6">
+                  <a:lumMod val="20000"/>
+                  <a:lumOff val="80000"/>
+                </a:schemeClr>
+              </a:gs>
+            </a:gsLst>
+            <a:path path="circle">
+              <a:fillToRect l="50000" t="50000" r="50000" b="50000"/>
+            </a:path>
+            <a:tileRect/>
+          </a:gradFill>
+          <a:ln w="12700">
+            <a:solidFill>
+              <a:schemeClr val="accent6">
+                <a:lumMod val="50000"/>
+              </a:schemeClr>
+            </a:solidFill>
+          </a:ln>
+          <a:effectLst>
+            <a:outerShdw blurRad="304800" dist="152400" dir="3360000" sx="95000" sy="95000" algn="ctr" rotWithShape="0">
+              <a:schemeClr val="tx1">
+                <a:alpha val="33000"/>
+              </a:schemeClr>
+            </a:outerShdw>
+          </a:effectLst>
+        </p:spPr>
+        <p:style>
+          <a:lnRef idx="2">
+            <a:schemeClr val="accent1">
+              <a:shade val="50000"/>
+            </a:schemeClr>
+          </a:lnRef>
+          <a:fillRef idx="1">
+            <a:schemeClr val="accent1"/>
+          </a:fillRef>
+          <a:effectRef idx="0">
+            <a:schemeClr val="accent1"/>
+          </a:effectRef>
+          <a:fontRef idx="minor">
+            <a:schemeClr val="lt1"/>
+          </a:fontRef>
+        </p:style>
+        <p:txBody>
+          <a:bodyPr rtlCol="0" anchor="ctr"/>
+          <a:lstStyle/>
+          <a:p>
+            <a:pPr algn="ctr"/>
+            <a:r>
+              <a:rPr lang="ru-RU" sz="3200" dirty="0">
+                <a:solidFill>
+                  <a:schemeClr val="accent6">
+                    <a:lumMod val="50000"/>
+                  </a:schemeClr>
+                </a:solidFill>
+              </a:rPr>
+              <a:t>Метка просмотренных публикаций</a:t>
+            </a:r>
+          </a:p>
+        </p:txBody>
+      </p:sp>
+      <p:cxnSp>
+        <p:nvCxnSpPr>
+          <p:cNvPr id="49" name="Прямая со стрелкой 48">
+            <a:extLst>
+              <a:ext uri="{FF2B5EF4-FFF2-40B4-BE49-F238E27FC236}">
+                <a16:creationId xmlns:a16="http://schemas.microsoft.com/office/drawing/2014/main" id="{12A4C2AF-38E1-458D-A017-3EA58D075D59}"/>
+              </a:ext>
+            </a:extLst>
+          </p:cNvPr>
+          <p:cNvCxnSpPr>
+            <a:cxnSpLocks/>
+            <a:stCxn id="10" idx="3"/>
+            <a:endCxn id="45" idx="1"/>
+          </p:cNvCxnSpPr>
+          <p:nvPr/>
+        </p:nvCxnSpPr>
+        <p:spPr>
+          <a:xfrm>
+            <a:off x="15553877" y="4013652"/>
+            <a:ext cx="12104458" cy="0"/>
+          </a:xfrm>
+          <a:prstGeom prst="straightConnector1">
+            <a:avLst/>
+          </a:prstGeom>
+          <a:ln>
+            <a:solidFill>
+              <a:schemeClr val="accent6">
+                <a:lumMod val="50000"/>
+              </a:schemeClr>
+            </a:solidFill>
+            <a:tailEnd type="triangle"/>
+          </a:ln>
+        </p:spPr>
+        <p:style>
+          <a:lnRef idx="1">
+            <a:schemeClr val="accent1"/>
+          </a:lnRef>
+          <a:fillRef idx="0">
+            <a:schemeClr val="accent1"/>
+          </a:fillRef>
+          <a:effectRef idx="0">
+            <a:schemeClr val="accent1"/>
+          </a:effectRef>
+          <a:fontRef idx="minor">
+            <a:schemeClr val="tx1"/>
+          </a:fontRef>
+        </p:style>
+      </p:cxnSp>
+      <p:cxnSp>
+        <p:nvCxnSpPr>
+          <p:cNvPr id="51" name="Прямая со стрелкой 50">
+            <a:extLst>
+              <a:ext uri="{FF2B5EF4-FFF2-40B4-BE49-F238E27FC236}">
+                <a16:creationId xmlns:a16="http://schemas.microsoft.com/office/drawing/2014/main" id="{114F6334-E6B9-4CDA-B00F-ABFBB04F3C5F}"/>
+              </a:ext>
+            </a:extLst>
+          </p:cNvPr>
+          <p:cNvCxnSpPr>
+            <a:cxnSpLocks/>
+            <a:stCxn id="5" idx="0"/>
+            <a:endCxn id="45" idx="2"/>
+          </p:cNvCxnSpPr>
+          <p:nvPr/>
+        </p:nvCxnSpPr>
+        <p:spPr>
+          <a:xfrm flipV="1">
+            <a:off x="16706697" y="4619364"/>
+            <a:ext cx="13606152" cy="12070206"/>
+          </a:xfrm>
+          <a:prstGeom prst="straightConnector1">
+            <a:avLst/>
+          </a:prstGeom>
+          <a:ln>
+            <a:solidFill>
+              <a:schemeClr val="accent6">
+                <a:lumMod val="50000"/>
+              </a:schemeClr>
+            </a:solidFill>
+            <a:tailEnd type="triangle"/>
+          </a:ln>
+        </p:spPr>
+        <p:style>
+          <a:lnRef idx="1">
+            <a:schemeClr val="accent1"/>
+          </a:lnRef>
+          <a:fillRef idx="0">
+            <a:schemeClr val="accent1"/>
+          </a:fillRef>
+          <a:effectRef idx="0">
+            <a:schemeClr val="accent1"/>
+          </a:effectRef>
+          <a:fontRef idx="minor">
+            <a:schemeClr val="tx1"/>
+          </a:fontRef>
+        </p:style>
+      </p:cxnSp>
+      <p:cxnSp>
+        <p:nvCxnSpPr>
+          <p:cNvPr id="66" name="Прямая со стрелкой 65">
+            <a:extLst>
+              <a:ext uri="{FF2B5EF4-FFF2-40B4-BE49-F238E27FC236}">
+                <a16:creationId xmlns:a16="http://schemas.microsoft.com/office/drawing/2014/main" id="{DD76AF86-FAF4-46A4-96F3-75DFB21D2F7B}"/>
+              </a:ext>
+            </a:extLst>
+          </p:cNvPr>
+          <p:cNvCxnSpPr>
+            <a:cxnSpLocks/>
+            <a:stCxn id="25" idx="3"/>
+            <a:endCxn id="44" idx="2"/>
+          </p:cNvCxnSpPr>
+          <p:nvPr/>
+        </p:nvCxnSpPr>
+        <p:spPr>
+          <a:xfrm flipV="1">
+            <a:off x="7675065" y="10457439"/>
+            <a:ext cx="3122208" cy="1016968"/>
+          </a:xfrm>
+          <a:prstGeom prst="straightConnector1">
+            <a:avLst/>
+          </a:prstGeom>
+          <a:ln>
+            <a:solidFill>
+              <a:schemeClr val="accent6">
+                <a:lumMod val="50000"/>
+              </a:schemeClr>
+            </a:solidFill>
+            <a:tailEnd type="triangle"/>
+          </a:ln>
+        </p:spPr>
+        <p:style>
+          <a:lnRef idx="1">
+            <a:schemeClr val="accent1"/>
+          </a:lnRef>
+          <a:fillRef idx="0">
+            <a:schemeClr val="accent1"/>
+          </a:fillRef>
+          <a:effectRef idx="0">
+            <a:schemeClr val="accent1"/>
+          </a:effectRef>
+          <a:fontRef idx="minor">
+            <a:schemeClr val="tx1"/>
+          </a:fontRef>
+        </p:style>
+      </p:cxnSp>
+      <p:cxnSp>
+        <p:nvCxnSpPr>
+          <p:cNvPr id="67" name="Прямая со стрелкой 66">
+            <a:extLst>
+              <a:ext uri="{FF2B5EF4-FFF2-40B4-BE49-F238E27FC236}">
+                <a16:creationId xmlns:a16="http://schemas.microsoft.com/office/drawing/2014/main" id="{FF2A9FD0-C999-4C4D-9D16-DEE9CAE01CEF}"/>
+              </a:ext>
+            </a:extLst>
+          </p:cNvPr>
+          <p:cNvCxnSpPr>
+            <a:cxnSpLocks/>
+            <a:stCxn id="52" idx="3"/>
+            <a:endCxn id="44" idx="0"/>
+          </p:cNvCxnSpPr>
+          <p:nvPr/>
+        </p:nvCxnSpPr>
+        <p:spPr>
+          <a:xfrm>
+            <a:off x="7675065" y="8142795"/>
+            <a:ext cx="3122208" cy="1103220"/>
           </a:xfrm>
           <a:prstGeom prst="straightConnector1">
             <a:avLst/>
